--- a/ゲーム科1年/00_前期/ゲームプログラミングⅢ/ゲーム数学/実習/00_坂道の移動.pptx
+++ b/ゲーム科1年/00_前期/ゲームプログラミングⅢ/ゲーム数学/実習/00_坂道の移動.pptx
@@ -266,7 +266,7 @@
           <a:p>
             <a:fld id="{E9CC885B-4903-4D54-9A93-00025F12DED9}" type="datetimeFigureOut">
               <a:rPr kumimoji="1" lang="ja-JP" altLang="en-US" smtClean="0"/>
-              <a:t>2024/10/28</a:t>
+              <a:t>2025/6/10</a:t>
             </a:fld>
             <a:endParaRPr kumimoji="1" lang="ja-JP" altLang="en-US"/>
           </a:p>
@@ -496,7 +496,7 @@
           <a:p>
             <a:fld id="{E9CC885B-4903-4D54-9A93-00025F12DED9}" type="datetimeFigureOut">
               <a:rPr kumimoji="1" lang="ja-JP" altLang="en-US" smtClean="0"/>
-              <a:t>2024/10/28</a:t>
+              <a:t>2025/6/10</a:t>
             </a:fld>
             <a:endParaRPr kumimoji="1" lang="ja-JP" altLang="en-US"/>
           </a:p>
@@ -736,7 +736,7 @@
           <a:p>
             <a:fld id="{E9CC885B-4903-4D54-9A93-00025F12DED9}" type="datetimeFigureOut">
               <a:rPr kumimoji="1" lang="ja-JP" altLang="en-US" smtClean="0"/>
-              <a:t>2024/10/28</a:t>
+              <a:t>2025/6/10</a:t>
             </a:fld>
             <a:endParaRPr kumimoji="1" lang="ja-JP" altLang="en-US"/>
           </a:p>
@@ -966,7 +966,7 @@
           <a:p>
             <a:fld id="{E9CC885B-4903-4D54-9A93-00025F12DED9}" type="datetimeFigureOut">
               <a:rPr kumimoji="1" lang="ja-JP" altLang="en-US" smtClean="0"/>
-              <a:t>2024/10/28</a:t>
+              <a:t>2025/6/10</a:t>
             </a:fld>
             <a:endParaRPr kumimoji="1" lang="ja-JP" altLang="en-US"/>
           </a:p>
@@ -1241,7 +1241,7 @@
           <a:p>
             <a:fld id="{E9CC885B-4903-4D54-9A93-00025F12DED9}" type="datetimeFigureOut">
               <a:rPr kumimoji="1" lang="ja-JP" altLang="en-US" smtClean="0"/>
-              <a:t>2024/10/28</a:t>
+              <a:t>2025/6/10</a:t>
             </a:fld>
             <a:endParaRPr kumimoji="1" lang="ja-JP" altLang="en-US"/>
           </a:p>
@@ -1570,7 +1570,7 @@
           <a:p>
             <a:fld id="{E9CC885B-4903-4D54-9A93-00025F12DED9}" type="datetimeFigureOut">
               <a:rPr kumimoji="1" lang="ja-JP" altLang="en-US" smtClean="0"/>
-              <a:t>2024/10/28</a:t>
+              <a:t>2025/6/10</a:t>
             </a:fld>
             <a:endParaRPr kumimoji="1" lang="ja-JP" altLang="en-US"/>
           </a:p>
@@ -2046,7 +2046,7 @@
           <a:p>
             <a:fld id="{E9CC885B-4903-4D54-9A93-00025F12DED9}" type="datetimeFigureOut">
               <a:rPr kumimoji="1" lang="ja-JP" altLang="en-US" smtClean="0"/>
-              <a:t>2024/10/28</a:t>
+              <a:t>2025/6/10</a:t>
             </a:fld>
             <a:endParaRPr kumimoji="1" lang="ja-JP" altLang="en-US"/>
           </a:p>
@@ -2187,7 +2187,7 @@
           <a:p>
             <a:fld id="{E9CC885B-4903-4D54-9A93-00025F12DED9}" type="datetimeFigureOut">
               <a:rPr kumimoji="1" lang="ja-JP" altLang="en-US" smtClean="0"/>
-              <a:t>2024/10/28</a:t>
+              <a:t>2025/6/10</a:t>
             </a:fld>
             <a:endParaRPr kumimoji="1" lang="ja-JP" altLang="en-US"/>
           </a:p>
@@ -2300,7 +2300,7 @@
           <a:p>
             <a:fld id="{E9CC885B-4903-4D54-9A93-00025F12DED9}" type="datetimeFigureOut">
               <a:rPr kumimoji="1" lang="ja-JP" altLang="en-US" smtClean="0"/>
-              <a:t>2024/10/28</a:t>
+              <a:t>2025/6/10</a:t>
             </a:fld>
             <a:endParaRPr kumimoji="1" lang="ja-JP" altLang="en-US"/>
           </a:p>
@@ -2643,7 +2643,7 @@
           <a:p>
             <a:fld id="{E9CC885B-4903-4D54-9A93-00025F12DED9}" type="datetimeFigureOut">
               <a:rPr kumimoji="1" lang="ja-JP" altLang="en-US" smtClean="0"/>
-              <a:t>2024/10/28</a:t>
+              <a:t>2025/6/10</a:t>
             </a:fld>
             <a:endParaRPr kumimoji="1" lang="ja-JP" altLang="en-US"/>
           </a:p>
@@ -2931,7 +2931,7 @@
           <a:p>
             <a:fld id="{E9CC885B-4903-4D54-9A93-00025F12DED9}" type="datetimeFigureOut">
               <a:rPr kumimoji="1" lang="ja-JP" altLang="en-US" smtClean="0"/>
-              <a:t>2024/10/28</a:t>
+              <a:t>2025/6/10</a:t>
             </a:fld>
             <a:endParaRPr kumimoji="1" lang="ja-JP" altLang="en-US"/>
           </a:p>
@@ -3204,7 +3204,7 @@
           <a:p>
             <a:fld id="{E9CC885B-4903-4D54-9A93-00025F12DED9}" type="datetimeFigureOut">
               <a:rPr kumimoji="1" lang="ja-JP" altLang="en-US" smtClean="0"/>
-              <a:t>2024/10/28</a:t>
+              <a:t>2025/6/10</a:t>
             </a:fld>
             <a:endParaRPr kumimoji="1" lang="ja-JP" altLang="en-US"/>
           </a:p>
@@ -3828,8 +3828,8 @@
           </a:p>
         </p:txBody>
       </p:sp>
-      <mc:AlternateContent xmlns:mc="http://schemas.openxmlformats.org/markup-compatibility/2006">
-        <mc:Choice xmlns:a14="http://schemas.microsoft.com/office/drawing/2010/main" Requires="a14">
+      <mc:AlternateContent xmlns:mc="http://schemas.openxmlformats.org/markup-compatibility/2006" xmlns:a14="http://schemas.microsoft.com/office/drawing/2010/main">
+        <mc:Choice Requires="a14">
           <p:sp>
             <p:nvSpPr>
               <p:cNvPr id="6" name="テキスト ボックス 5">
@@ -3898,7 +3898,7 @@
                         <a:rPr kumimoji="1" lang="en-US" altLang="ja-JP" sz="2400" b="0" i="1" smtClean="0">
                           <a:latin typeface="Cambria Math" panose="02040503050406030204" pitchFamily="18" charset="0"/>
                         </a:rPr>
-                        <m:t>𝑎</m:t>
+                        <m:t>𝑚</m:t>
                       </m:r>
                       <m:r>
                         <a:rPr kumimoji="1" lang="en-US" altLang="ja-JP" sz="2400" b="0" i="1" smtClean="0">
@@ -3919,7 +3919,7 @@
                             <a:rPr kumimoji="1" lang="en-US" altLang="ja-JP" sz="2400" b="0" i="1" smtClean="0">
                               <a:latin typeface="Cambria Math" panose="02040503050406030204" pitchFamily="18" charset="0"/>
                             </a:rPr>
-                            <m:t>𝑥</m:t>
+                            <m:t>𝑦</m:t>
                           </m:r>
                           <m:r>
                             <a:rPr lang="ja-JP" altLang="en-US" sz="2400" i="1">
@@ -3939,7 +3939,7 @@
                             <a:rPr kumimoji="1" lang="en-US" altLang="ja-JP" sz="2400" b="0" i="1" smtClean="0">
                               <a:latin typeface="Cambria Math" panose="02040503050406030204" pitchFamily="18" charset="0"/>
                             </a:rPr>
-                            <m:t>𝑦</m:t>
+                            <m:t>𝑥</m:t>
                           </m:r>
                           <m:r>
                             <a:rPr lang="ja-JP" altLang="en-US" sz="2400" i="1">
@@ -4002,7 +4002,7 @@
                         <a:rPr kumimoji="1" lang="en-US" altLang="ja-JP" sz="2400" b="0" i="1" smtClean="0">
                           <a:latin typeface="Cambria Math" panose="02040503050406030204" pitchFamily="18" charset="0"/>
                         </a:rPr>
-                        <m:t>𝑎𝑥</m:t>
+                        <m:t>𝑚𝑥</m:t>
                       </m:r>
                       <m:r>
                         <a:rPr kumimoji="1" lang="en-US" altLang="ja-JP" sz="2400" b="0" i="1" smtClean="0">
@@ -4022,7 +4022,6 @@
                 <a:endParaRPr kumimoji="1" lang="en-US" altLang="ja-JP" sz="2400" dirty="0"/>
               </a:p>
               <a:p>
-                <a:pPr/>
                 <a14:m>
                   <m:oMath xmlns:m="http://schemas.openxmlformats.org/officeDocument/2006/math">
                     <m:r>
@@ -4060,7 +4059,6 @@
                 <a:endParaRPr lang="en-US" altLang="ja-JP" sz="2400" dirty="0"/>
               </a:p>
               <a:p>
-                <a:pPr/>
                 <a14:m>
                   <m:oMath xmlns:m="http://schemas.openxmlformats.org/officeDocument/2006/math">
                     <m:r>
@@ -4092,7 +4090,6 @@
                 <a:endParaRPr kumimoji="1" lang="en-US" altLang="ja-JP" sz="2400" dirty="0"/>
               </a:p>
               <a:p>
-                <a:pPr/>
                 <a14:m>
                   <m:oMath xmlns:m="http://schemas.openxmlformats.org/officeDocument/2006/math">
                     <m:r>
@@ -4132,7 +4129,6 @@
                 <a:endParaRPr kumimoji="1" lang="en-US" altLang="ja-JP" sz="2400" dirty="0"/>
               </a:p>
               <a:p>
-                <a:pPr/>
                 <a14:m>
                   <m:oMath xmlns:m="http://schemas.openxmlformats.org/officeDocument/2006/math">
                     <m:r>
@@ -4170,7 +4166,7 @@
             </p:txBody>
           </p:sp>
         </mc:Choice>
-        <mc:Fallback>
+        <mc:Fallback xmlns="">
           <p:sp>
             <p:nvSpPr>
               <p:cNvPr id="6" name="テキスト ボックス 5">
@@ -4196,7 +4192,7 @@
               <a:blipFill>
                 <a:blip r:embed="rId2"/>
                 <a:stretch>
-                  <a:fillRect l="-1687" t="-1060" r="-787" b="-2252"/>
+                  <a:fillRect l="-1687" t="-1060" r="-787" b="-1325"/>
                 </a:stretch>
               </a:blipFill>
             </p:spPr>
@@ -4466,7 +4462,11 @@
           <a:lstStyle/>
           <a:p>
             <a:r>
-              <a:rPr kumimoji="1" lang="en-US" altLang="ja-JP" sz="2400" dirty="0"/>
+              <a:rPr kumimoji="1" lang="en-US" altLang="ja-JP" sz="2400" b="1" dirty="0">
+                <a:solidFill>
+                  <a:srgbClr val="FF0000"/>
+                </a:solidFill>
+              </a:rPr>
               <a:t>Player.cpp</a:t>
             </a:r>
             <a:r>
@@ -4968,7 +4968,13 @@
                         <a:rPr kumimoji="1" lang="en-US" altLang="ja-JP" sz="2400" b="0" i="1" smtClean="0">
                           <a:latin typeface="Cambria Math" panose="02040503050406030204" pitchFamily="18" charset="0"/>
                         </a:rPr>
-                        <m:t>𝑎𝑥</m:t>
+                        <m:t>𝑚</m:t>
+                      </m:r>
+                      <m:r>
+                        <a:rPr kumimoji="1" lang="en-US" altLang="ja-JP" sz="2400" b="0" i="1" smtClean="0">
+                          <a:latin typeface="Cambria Math" panose="02040503050406030204" pitchFamily="18" charset="0"/>
+                        </a:rPr>
+                        <m:t>𝑥</m:t>
                       </m:r>
                       <m:r>
                         <a:rPr kumimoji="1" lang="en-US" altLang="ja-JP" sz="2400" b="0" i="1" smtClean="0">
@@ -5192,11 +5198,9 @@
                 <a:endParaRPr kumimoji="1" lang="en-US" altLang="ja-JP" sz="2400" dirty="0"/>
               </a:p>
               <a:p>
-                <a:pPr/>
                 <a:endParaRPr lang="en-US" altLang="ja-JP" sz="2400" dirty="0"/>
               </a:p>
               <a:p>
-                <a:pPr/>
                 <a:r>
                   <a:rPr kumimoji="1" lang="ja-JP" altLang="en-US" sz="2400" dirty="0"/>
                   <a:t>これで切片</a:t>
@@ -5330,8 +5334,8 @@
           </a:p>
         </p:txBody>
       </p:sp>
-      <mc:AlternateContent xmlns:mc="http://schemas.openxmlformats.org/markup-compatibility/2006">
-        <mc:Choice xmlns:a14="http://schemas.microsoft.com/office/drawing/2010/main" Requires="a14">
+      <mc:AlternateContent xmlns:mc="http://schemas.openxmlformats.org/markup-compatibility/2006" xmlns:a14="http://schemas.microsoft.com/office/drawing/2010/main">
+        <mc:Choice Requires="a14">
           <p:sp>
             <p:nvSpPr>
               <p:cNvPr id="6" name="テキスト ボックス 5">
@@ -5393,7 +5397,7 @@
                         <a:rPr kumimoji="1" lang="en-US" altLang="ja-JP" sz="2400" b="0" i="1" smtClean="0">
                           <a:latin typeface="Cambria Math" panose="02040503050406030204" pitchFamily="18" charset="0"/>
                         </a:rPr>
-                        <m:t>𝑎𝑥</m:t>
+                        <m:t>𝑚𝑥</m:t>
                       </m:r>
                       <m:r>
                         <a:rPr kumimoji="1" lang="en-US" altLang="ja-JP" sz="2400" b="0" i="1" smtClean="0">
@@ -5413,7 +5417,6 @@
                 <a:endParaRPr kumimoji="1" lang="en-US" altLang="ja-JP" sz="2400" dirty="0"/>
               </a:p>
               <a:p>
-                <a:pPr/>
                 <a14:m>
                   <m:oMath xmlns:m="http://schemas.openxmlformats.org/officeDocument/2006/math">
                     <m:r>
@@ -5485,11 +5488,9 @@
                 <a:endParaRPr kumimoji="1" lang="en-US" altLang="ja-JP" sz="2400" dirty="0"/>
               </a:p>
               <a:p>
-                <a:pPr/>
                 <a:endParaRPr lang="en-US" altLang="ja-JP" sz="2400" dirty="0"/>
               </a:p>
               <a:p>
-                <a:pPr/>
                 <a:r>
                   <a:rPr kumimoji="1" lang="ja-JP" altLang="en-US" sz="2400" dirty="0"/>
                   <a:t>足元の</a:t>
@@ -5505,7 +5506,6 @@
                 <a:endParaRPr kumimoji="1" lang="en-US" altLang="ja-JP" sz="2400" dirty="0"/>
               </a:p>
               <a:p>
-                <a:pPr/>
                 <a:r>
                   <a:rPr lang="ja-JP" altLang="en-US" sz="2400" dirty="0"/>
                   <a:t>足元の</a:t>
@@ -5533,7 +5533,6 @@
                 </a:endParaRPr>
               </a:p>
               <a:p>
-                <a:pPr/>
                 <a:endParaRPr kumimoji="1" lang="en-US" altLang="ja-JP" sz="2400" dirty="0">
                   <a:solidFill>
                     <a:srgbClr val="0070C0"/>
@@ -5541,7 +5540,6 @@
                 </a:endParaRPr>
               </a:p>
               <a:p>
-                <a:pPr/>
                 <a:r>
                   <a:rPr kumimoji="1" lang="en-US" altLang="ja-JP" sz="2400" dirty="0" err="1">
                     <a:solidFill>
@@ -5557,7 +5555,6 @@
                 <a:endParaRPr kumimoji="1" lang="en-US" altLang="ja-JP" sz="2400" dirty="0"/>
               </a:p>
               <a:p>
-                <a:pPr/>
                 <a:r>
                   <a:rPr lang="ja-JP" altLang="en-US" sz="2400" dirty="0"/>
                   <a:t>正しく計算できていれば、坂道を上ることができます。</a:t>
@@ -5567,7 +5564,7 @@
             </p:txBody>
           </p:sp>
         </mc:Choice>
-        <mc:Fallback>
+        <mc:Fallback xmlns="">
           <p:sp>
             <p:nvSpPr>
               <p:cNvPr id="6" name="テキスト ボックス 5">

--- a/ゲーム科1年/00_前期/ゲームプログラミングⅢ/ゲーム数学/実習/00_坂道の移動.pptx
+++ b/ゲーム科1年/00_前期/ゲームプログラミングⅢ/ゲーム数学/実習/00_坂道の移動.pptx
@@ -266,7 +266,7 @@
           <a:p>
             <a:fld id="{E9CC885B-4903-4D54-9A93-00025F12DED9}" type="datetimeFigureOut">
               <a:rPr kumimoji="1" lang="ja-JP" altLang="en-US" smtClean="0"/>
-              <a:t>2025/6/10</a:t>
+              <a:t>2026/2/18</a:t>
             </a:fld>
             <a:endParaRPr kumimoji="1" lang="ja-JP" altLang="en-US"/>
           </a:p>
@@ -496,7 +496,7 @@
           <a:p>
             <a:fld id="{E9CC885B-4903-4D54-9A93-00025F12DED9}" type="datetimeFigureOut">
               <a:rPr kumimoji="1" lang="ja-JP" altLang="en-US" smtClean="0"/>
-              <a:t>2025/6/10</a:t>
+              <a:t>2026/2/18</a:t>
             </a:fld>
             <a:endParaRPr kumimoji="1" lang="ja-JP" altLang="en-US"/>
           </a:p>
@@ -736,7 +736,7 @@
           <a:p>
             <a:fld id="{E9CC885B-4903-4D54-9A93-00025F12DED9}" type="datetimeFigureOut">
               <a:rPr kumimoji="1" lang="ja-JP" altLang="en-US" smtClean="0"/>
-              <a:t>2025/6/10</a:t>
+              <a:t>2026/2/18</a:t>
             </a:fld>
             <a:endParaRPr kumimoji="1" lang="ja-JP" altLang="en-US"/>
           </a:p>
@@ -966,7 +966,7 @@
           <a:p>
             <a:fld id="{E9CC885B-4903-4D54-9A93-00025F12DED9}" type="datetimeFigureOut">
               <a:rPr kumimoji="1" lang="ja-JP" altLang="en-US" smtClean="0"/>
-              <a:t>2025/6/10</a:t>
+              <a:t>2026/2/18</a:t>
             </a:fld>
             <a:endParaRPr kumimoji="1" lang="ja-JP" altLang="en-US"/>
           </a:p>
@@ -1241,7 +1241,7 @@
           <a:p>
             <a:fld id="{E9CC885B-4903-4D54-9A93-00025F12DED9}" type="datetimeFigureOut">
               <a:rPr kumimoji="1" lang="ja-JP" altLang="en-US" smtClean="0"/>
-              <a:t>2025/6/10</a:t>
+              <a:t>2026/2/18</a:t>
             </a:fld>
             <a:endParaRPr kumimoji="1" lang="ja-JP" altLang="en-US"/>
           </a:p>
@@ -1570,7 +1570,7 @@
           <a:p>
             <a:fld id="{E9CC885B-4903-4D54-9A93-00025F12DED9}" type="datetimeFigureOut">
               <a:rPr kumimoji="1" lang="ja-JP" altLang="en-US" smtClean="0"/>
-              <a:t>2025/6/10</a:t>
+              <a:t>2026/2/18</a:t>
             </a:fld>
             <a:endParaRPr kumimoji="1" lang="ja-JP" altLang="en-US"/>
           </a:p>
@@ -2046,7 +2046,7 @@
           <a:p>
             <a:fld id="{E9CC885B-4903-4D54-9A93-00025F12DED9}" type="datetimeFigureOut">
               <a:rPr kumimoji="1" lang="ja-JP" altLang="en-US" smtClean="0"/>
-              <a:t>2025/6/10</a:t>
+              <a:t>2026/2/18</a:t>
             </a:fld>
             <a:endParaRPr kumimoji="1" lang="ja-JP" altLang="en-US"/>
           </a:p>
@@ -2187,7 +2187,7 @@
           <a:p>
             <a:fld id="{E9CC885B-4903-4D54-9A93-00025F12DED9}" type="datetimeFigureOut">
               <a:rPr kumimoji="1" lang="ja-JP" altLang="en-US" smtClean="0"/>
-              <a:t>2025/6/10</a:t>
+              <a:t>2026/2/18</a:t>
             </a:fld>
             <a:endParaRPr kumimoji="1" lang="ja-JP" altLang="en-US"/>
           </a:p>
@@ -2300,7 +2300,7 @@
           <a:p>
             <a:fld id="{E9CC885B-4903-4D54-9A93-00025F12DED9}" type="datetimeFigureOut">
               <a:rPr kumimoji="1" lang="ja-JP" altLang="en-US" smtClean="0"/>
-              <a:t>2025/6/10</a:t>
+              <a:t>2026/2/18</a:t>
             </a:fld>
             <a:endParaRPr kumimoji="1" lang="ja-JP" altLang="en-US"/>
           </a:p>
@@ -2643,7 +2643,7 @@
           <a:p>
             <a:fld id="{E9CC885B-4903-4D54-9A93-00025F12DED9}" type="datetimeFigureOut">
               <a:rPr kumimoji="1" lang="ja-JP" altLang="en-US" smtClean="0"/>
-              <a:t>2025/6/10</a:t>
+              <a:t>2026/2/18</a:t>
             </a:fld>
             <a:endParaRPr kumimoji="1" lang="ja-JP" altLang="en-US"/>
           </a:p>
@@ -2931,7 +2931,7 @@
           <a:p>
             <a:fld id="{E9CC885B-4903-4D54-9A93-00025F12DED9}" type="datetimeFigureOut">
               <a:rPr kumimoji="1" lang="ja-JP" altLang="en-US" smtClean="0"/>
-              <a:t>2025/6/10</a:t>
+              <a:t>2026/2/18</a:t>
             </a:fld>
             <a:endParaRPr kumimoji="1" lang="ja-JP" altLang="en-US"/>
           </a:p>
@@ -3204,7 +3204,7 @@
           <a:p>
             <a:fld id="{E9CC885B-4903-4D54-9A93-00025F12DED9}" type="datetimeFigureOut">
               <a:rPr kumimoji="1" lang="ja-JP" altLang="en-US" smtClean="0"/>
-              <a:t>2025/6/10</a:t>
+              <a:t>2026/2/18</a:t>
             </a:fld>
             <a:endParaRPr kumimoji="1" lang="ja-JP" altLang="en-US"/>
           </a:p>
@@ -4448,7 +4448,7 @@
         <p:spPr>
           <a:xfrm>
             <a:off x="567542" y="1216429"/>
-            <a:ext cx="11224548" cy="830997"/>
+            <a:ext cx="9749785" cy="461665"/>
           </a:xfrm>
           <a:prstGeom prst="rect">
             <a:avLst/>
@@ -4467,30 +4467,31 @@
                   <a:srgbClr val="FF0000"/>
                 </a:solidFill>
               </a:rPr>
-              <a:t>Player.cpp</a:t>
+              <a:t>MapManager.cpp</a:t>
             </a:r>
             <a:r>
               <a:rPr kumimoji="1" lang="ja-JP" altLang="en-US" sz="2400" dirty="0"/>
               <a:t>の</a:t>
             </a:r>
             <a:r>
-              <a:rPr kumimoji="1" lang="en-US" altLang="ja-JP" sz="2400" dirty="0" err="1">
+              <a:rPr kumimoji="1" lang="en-US" altLang="ja-JP" sz="2400" b="1" dirty="0" err="1">
                 <a:solidFill>
                   <a:srgbClr val="0070C0"/>
                 </a:solidFill>
               </a:rPr>
-              <a:t>PlayerHitSlopeBlockY</a:t>
+              <a:t>ResolveSlope</a:t>
+            </a:r>
+            <a:r>
+              <a:rPr kumimoji="1" lang="ja-JP" altLang="en-US" sz="2400" b="1" dirty="0">
+                <a:solidFill>
+                  <a:srgbClr val="0070C0"/>
+                </a:solidFill>
+              </a:rPr>
+              <a:t>関数</a:t>
             </a:r>
             <a:r>
               <a:rPr kumimoji="1" lang="ja-JP" altLang="en-US" sz="2400" dirty="0"/>
-              <a:t>関数にある以下のコメントを探しましょう。</a:t>
-            </a:r>
-            <a:endParaRPr kumimoji="1" lang="en-US" altLang="ja-JP" sz="2400" dirty="0"/>
-          </a:p>
-          <a:p>
-            <a:r>
-              <a:rPr lang="ja-JP" altLang="en-US" sz="2400" dirty="0"/>
-              <a:t>ここに先ほどの手順の処理を書いていきます。</a:t>
+              <a:t>の以下の空白を埋めましょう</a:t>
             </a:r>
             <a:endParaRPr kumimoji="1" lang="en-US" altLang="ja-JP" sz="2400" dirty="0"/>
           </a:p>
@@ -4498,10 +4499,10 @@
       </p:sp>
       <p:pic>
         <p:nvPicPr>
-          <p:cNvPr id="3" name="図 2">
-            <a:extLst>
-              <a:ext uri="{FF2B5EF4-FFF2-40B4-BE49-F238E27FC236}">
-                <a16:creationId xmlns:a16="http://schemas.microsoft.com/office/drawing/2014/main" id="{71B4B8F7-F3FE-4094-A90B-FCCF069ECCF8}"/>
+          <p:cNvPr id="5" name="図 4">
+            <a:extLst>
+              <a:ext uri="{FF2B5EF4-FFF2-40B4-BE49-F238E27FC236}">
+                <a16:creationId xmlns:a16="http://schemas.microsoft.com/office/drawing/2014/main" id="{EC22FF88-62CB-4F54-8577-B66B78F3AB6D}"/>
               </a:ext>
             </a:extLst>
           </p:cNvPr>
@@ -4511,21 +4512,15 @@
           <p:nvPr/>
         </p:nvPicPr>
         <p:blipFill>
-          <a:blip r:embed="rId2">
-            <a:extLst>
-              <a:ext uri="{28A0092B-C50C-407E-A947-70E740481C1C}">
-                <a14:useLocalDpi xmlns:a14="http://schemas.microsoft.com/office/drawing/2010/main" val="0"/>
-              </a:ext>
-            </a:extLst>
-          </a:blip>
+          <a:blip r:embed="rId2"/>
           <a:stretch>
             <a:fillRect/>
           </a:stretch>
         </p:blipFill>
         <p:spPr>
           <a:xfrm>
-            <a:off x="567542" y="2187125"/>
-            <a:ext cx="9483060" cy="2779729"/>
+            <a:off x="567542" y="1817794"/>
+            <a:ext cx="10973680" cy="2314935"/>
           </a:xfrm>
           <a:prstGeom prst="rect">
             <a:avLst/>
@@ -4727,7 +4722,7 @@
         <p:spPr>
           <a:xfrm>
             <a:off x="567541" y="3835273"/>
-            <a:ext cx="7571303" cy="1938992"/>
+            <a:ext cx="6955750" cy="1938992"/>
           </a:xfrm>
           <a:prstGeom prst="rect">
             <a:avLst/>
@@ -4826,7 +4821,7 @@
                   <a:srgbClr val="FF0000"/>
                 </a:solidFill>
               </a:rPr>
-              <a:t>わからないときは座学の時の資料も見返してみよう</a:t>
+              <a:t>わからないときは座学の資料も見返してみよう</a:t>
             </a:r>
             <a:endParaRPr kumimoji="1" lang="en-US" altLang="ja-JP" sz="2400" b="1" dirty="0">
               <a:solidFill>
@@ -4901,8 +4896,8 @@
           </a:p>
         </p:txBody>
       </p:sp>
-      <mc:AlternateContent xmlns:mc="http://schemas.openxmlformats.org/markup-compatibility/2006">
-        <mc:Choice xmlns:a14="http://schemas.microsoft.com/office/drawing/2010/main" Requires="a14">
+      <mc:AlternateContent xmlns:mc="http://schemas.openxmlformats.org/markup-compatibility/2006" xmlns:a14="http://schemas.microsoft.com/office/drawing/2010/main">
+        <mc:Choice Requires="a14">
           <p:sp>
             <p:nvSpPr>
               <p:cNvPr id="6" name="テキスト ボックス 5">
@@ -4968,13 +4963,7 @@
                         <a:rPr kumimoji="1" lang="en-US" altLang="ja-JP" sz="2400" b="0" i="1" smtClean="0">
                           <a:latin typeface="Cambria Math" panose="02040503050406030204" pitchFamily="18" charset="0"/>
                         </a:rPr>
-                        <m:t>𝑚</m:t>
-                      </m:r>
-                      <m:r>
-                        <a:rPr kumimoji="1" lang="en-US" altLang="ja-JP" sz="2400" b="0" i="1" smtClean="0">
-                          <a:latin typeface="Cambria Math" panose="02040503050406030204" pitchFamily="18" charset="0"/>
-                        </a:rPr>
-                        <m:t>𝑥</m:t>
+                        <m:t>𝑚𝑥</m:t>
                       </m:r>
                       <m:r>
                         <a:rPr kumimoji="1" lang="en-US" altLang="ja-JP" sz="2400" b="0" i="1" smtClean="0">
@@ -5224,7 +5213,7 @@
             </p:txBody>
           </p:sp>
         </mc:Choice>
-        <mc:Fallback>
+        <mc:Fallback xmlns="">
           <p:sp>
             <p:nvSpPr>
               <p:cNvPr id="6" name="テキスト ボックス 5">
@@ -5334,8 +5323,8 @@
           </a:p>
         </p:txBody>
       </p:sp>
-      <mc:AlternateContent xmlns:mc="http://schemas.openxmlformats.org/markup-compatibility/2006" xmlns:a14="http://schemas.microsoft.com/office/drawing/2010/main">
-        <mc:Choice Requires="a14">
+      <mc:AlternateContent xmlns:mc="http://schemas.openxmlformats.org/markup-compatibility/2006">
+        <mc:Choice xmlns:a14="http://schemas.microsoft.com/office/drawing/2010/main" Requires="a14">
           <p:sp>
             <p:nvSpPr>
               <p:cNvPr id="6" name="テキスト ボックス 5">
@@ -5351,7 +5340,7 @@
             <p:spPr>
               <a:xfrm>
                 <a:off x="567542" y="1216429"/>
-                <a:ext cx="10737235" cy="3785845"/>
+                <a:ext cx="10737235" cy="3416513"/>
               </a:xfrm>
               <a:prstGeom prst="rect">
                 <a:avLst/>
@@ -5541,21 +5530,6 @@
               </a:p>
               <a:p>
                 <a:r>
-                  <a:rPr kumimoji="1" lang="en-US" altLang="ja-JP" sz="2400" dirty="0" err="1">
-                    <a:solidFill>
-                      <a:srgbClr val="0070C0"/>
-                    </a:solidFill>
-                  </a:rPr>
-                  <a:t>slopeY</a:t>
-                </a:r>
-                <a:r>
-                  <a:rPr kumimoji="1" lang="ja-JP" altLang="en-US" sz="2400" dirty="0"/>
-                  <a:t>という変数を用意して、計算結果を格納しましょう。</a:t>
-                </a:r>
-                <a:endParaRPr kumimoji="1" lang="en-US" altLang="ja-JP" sz="2400" dirty="0"/>
-              </a:p>
-              <a:p>
-                <a:r>
                   <a:rPr lang="ja-JP" altLang="en-US" sz="2400" dirty="0"/>
                   <a:t>正しく計算できていれば、坂道を上ることができます。</a:t>
                 </a:r>
@@ -5564,7 +5538,7 @@
             </p:txBody>
           </p:sp>
         </mc:Choice>
-        <mc:Fallback xmlns="">
+        <mc:Fallback>
           <p:sp>
             <p:nvSpPr>
               <p:cNvPr id="6" name="テキスト ボックス 5">
@@ -5582,7 +5556,7 @@
             <p:spPr>
               <a:xfrm>
                 <a:off x="567542" y="1216429"/>
-                <a:ext cx="10737235" cy="3785845"/>
+                <a:ext cx="10737235" cy="3416513"/>
               </a:xfrm>
               <a:prstGeom prst="rect">
                 <a:avLst/>
@@ -5590,7 +5564,7 @@
               <a:blipFill>
                 <a:blip r:embed="rId2"/>
                 <a:stretch>
-                  <a:fillRect l="-852" t="-1288" b="-2738"/>
+                  <a:fillRect l="-852" t="-1429" b="-3214"/>
                 </a:stretch>
               </a:blipFill>
             </p:spPr>
@@ -5724,12 +5698,71 @@
           </a:p>
         </p:txBody>
       </p:sp>
+      <p:sp>
+        <p:nvSpPr>
+          <p:cNvPr id="7" name="テキスト ボックス 6">
+            <a:extLst>
+              <a:ext uri="{FF2B5EF4-FFF2-40B4-BE49-F238E27FC236}">
+                <a16:creationId xmlns:a16="http://schemas.microsoft.com/office/drawing/2014/main" id="{B3CF12F1-9D14-40C3-A36E-34B174E963DA}"/>
+              </a:ext>
+            </a:extLst>
+          </p:cNvPr>
+          <p:cNvSpPr txBox="1"/>
+          <p:nvPr/>
+        </p:nvSpPr>
+        <p:spPr>
+          <a:xfrm>
+            <a:off x="553139" y="5420688"/>
+            <a:ext cx="8210902" cy="830997"/>
+          </a:xfrm>
+          <a:prstGeom prst="rect">
+            <a:avLst/>
+          </a:prstGeom>
+          <a:noFill/>
+        </p:spPr>
+        <p:txBody>
+          <a:bodyPr wrap="none" rtlCol="0">
+            <a:spAutoFit/>
+          </a:bodyPr>
+          <a:lstStyle/>
+          <a:p>
+            <a:r>
+              <a:rPr kumimoji="1" lang="en-US" altLang="ja-JP" sz="2400" b="1" dirty="0">
+                <a:solidFill>
+                  <a:srgbClr val="7030A0"/>
+                </a:solidFill>
+              </a:rPr>
+              <a:t>SLOPE_ATTRACTION</a:t>
+            </a:r>
+            <a:r>
+              <a:rPr kumimoji="1" lang="ja-JP" altLang="en-US" sz="2400" dirty="0"/>
+              <a:t>を</a:t>
+            </a:r>
+            <a:r>
+              <a:rPr kumimoji="1" lang="en-US" altLang="ja-JP" sz="2400" dirty="0"/>
+              <a:t>0</a:t>
+            </a:r>
+            <a:r>
+              <a:rPr kumimoji="1" lang="ja-JP" altLang="en-US" sz="2400" dirty="0"/>
+              <a:t>にして坂を下ってみましょう。</a:t>
+            </a:r>
+            <a:endParaRPr kumimoji="1" lang="en-US" altLang="ja-JP" sz="2400" dirty="0"/>
+          </a:p>
+          <a:p>
+            <a:r>
+              <a:rPr lang="ja-JP" altLang="en-US" sz="2400" dirty="0"/>
+              <a:t>浮きながら坂を下ると思います。</a:t>
+            </a:r>
+            <a:endParaRPr kumimoji="1" lang="en-US" altLang="ja-JP" sz="2400" dirty="0"/>
+          </a:p>
+        </p:txBody>
+      </p:sp>
       <p:pic>
         <p:nvPicPr>
-          <p:cNvPr id="3" name="図 2">
-            <a:extLst>
-              <a:ext uri="{FF2B5EF4-FFF2-40B4-BE49-F238E27FC236}">
-                <a16:creationId xmlns:a16="http://schemas.microsoft.com/office/drawing/2014/main" id="{9125FCD3-ED10-44D4-B059-C6634305AE07}"/>
+          <p:cNvPr id="9" name="図 8">
+            <a:extLst>
+              <a:ext uri="{FF2B5EF4-FFF2-40B4-BE49-F238E27FC236}">
+                <a16:creationId xmlns:a16="http://schemas.microsoft.com/office/drawing/2014/main" id="{52F0E5DC-082D-49B2-A425-79327379C751}"/>
               </a:ext>
             </a:extLst>
           </p:cNvPr>
@@ -5739,13 +5772,7 @@
           <p:nvPr/>
         </p:nvPicPr>
         <p:blipFill>
-          <a:blip r:embed="rId2">
-            <a:extLst>
-              <a:ext uri="{28A0092B-C50C-407E-A947-70E740481C1C}">
-                <a14:useLocalDpi xmlns:a14="http://schemas.microsoft.com/office/drawing/2010/main" val="0"/>
-              </a:ext>
-            </a:extLst>
-          </a:blip>
+          <a:blip r:embed="rId2"/>
           <a:stretch>
             <a:fillRect/>
           </a:stretch>
@@ -5753,72 +5780,13 @@
         <p:spPr>
           <a:xfrm>
             <a:off x="567542" y="2556458"/>
-            <a:ext cx="6773220" cy="2076740"/>
+            <a:ext cx="8049748" cy="2724530"/>
           </a:xfrm>
           <a:prstGeom prst="rect">
             <a:avLst/>
           </a:prstGeom>
         </p:spPr>
       </p:pic>
-      <p:sp>
-        <p:nvSpPr>
-          <p:cNvPr id="7" name="テキスト ボックス 6">
-            <a:extLst>
-              <a:ext uri="{FF2B5EF4-FFF2-40B4-BE49-F238E27FC236}">
-                <a16:creationId xmlns:a16="http://schemas.microsoft.com/office/drawing/2014/main" id="{B3CF12F1-9D14-40C3-A36E-34B174E963DA}"/>
-              </a:ext>
-            </a:extLst>
-          </p:cNvPr>
-          <p:cNvSpPr txBox="1"/>
-          <p:nvPr/>
-        </p:nvSpPr>
-        <p:spPr>
-          <a:xfrm>
-            <a:off x="567542" y="4773192"/>
-            <a:ext cx="9408345" cy="830997"/>
-          </a:xfrm>
-          <a:prstGeom prst="rect">
-            <a:avLst/>
-          </a:prstGeom>
-          <a:noFill/>
-        </p:spPr>
-        <p:txBody>
-          <a:bodyPr wrap="none" rtlCol="0">
-            <a:spAutoFit/>
-          </a:bodyPr>
-          <a:lstStyle/>
-          <a:p>
-            <a:r>
-              <a:rPr kumimoji="1" lang="en-US" altLang="ja-JP" sz="2400" dirty="0">
-                <a:solidFill>
-                  <a:srgbClr val="7030A0"/>
-                </a:solidFill>
-              </a:rPr>
-              <a:t>PLAYER_SLOPE_ATTRACTION</a:t>
-            </a:r>
-            <a:r>
-              <a:rPr kumimoji="1" lang="ja-JP" altLang="en-US" sz="2400" dirty="0"/>
-              <a:t>を</a:t>
-            </a:r>
-            <a:r>
-              <a:rPr kumimoji="1" lang="en-US" altLang="ja-JP" sz="2400" dirty="0"/>
-              <a:t>0</a:t>
-            </a:r>
-            <a:r>
-              <a:rPr kumimoji="1" lang="ja-JP" altLang="en-US" sz="2400" dirty="0"/>
-              <a:t>にして坂を下ってみましょう。</a:t>
-            </a:r>
-            <a:endParaRPr kumimoji="1" lang="en-US" altLang="ja-JP" sz="2400" dirty="0"/>
-          </a:p>
-          <a:p>
-            <a:r>
-              <a:rPr lang="ja-JP" altLang="en-US" sz="2400" dirty="0"/>
-              <a:t>浮きながら坂を下ると思います。</a:t>
-            </a:r>
-            <a:endParaRPr kumimoji="1" lang="en-US" altLang="ja-JP" sz="2400" dirty="0"/>
-          </a:p>
-        </p:txBody>
-      </p:sp>
     </p:spTree>
     <p:extLst>
       <p:ext uri="{BB962C8B-B14F-4D97-AF65-F5344CB8AC3E}">

--- a/ゲーム科1年/00_前期/ゲームプログラミングⅢ/ゲーム数学/実習/00_坂道の移動.pptx
+++ b/ゲーム科1年/00_前期/ゲームプログラミングⅢ/ゲーム数学/実習/00_坂道の移動.pptx
@@ -13,6 +13,7 @@
     <p:sldId id="261" r:id="rId7"/>
     <p:sldId id="262" r:id="rId8"/>
     <p:sldId id="263" r:id="rId9"/>
+    <p:sldId id="264" r:id="rId10"/>
   </p:sldIdLst>
   <p:sldSz cx="12192000" cy="6858000"/>
   <p:notesSz cx="6858000" cy="9144000"/>
@@ -266,7 +267,7 @@
           <a:p>
             <a:fld id="{E9CC885B-4903-4D54-9A93-00025F12DED9}" type="datetimeFigureOut">
               <a:rPr kumimoji="1" lang="ja-JP" altLang="en-US" smtClean="0"/>
-              <a:t>2026/2/18</a:t>
+              <a:t>2026/2/19</a:t>
             </a:fld>
             <a:endParaRPr kumimoji="1" lang="ja-JP" altLang="en-US"/>
           </a:p>
@@ -496,7 +497,7 @@
           <a:p>
             <a:fld id="{E9CC885B-4903-4D54-9A93-00025F12DED9}" type="datetimeFigureOut">
               <a:rPr kumimoji="1" lang="ja-JP" altLang="en-US" smtClean="0"/>
-              <a:t>2026/2/18</a:t>
+              <a:t>2026/2/19</a:t>
             </a:fld>
             <a:endParaRPr kumimoji="1" lang="ja-JP" altLang="en-US"/>
           </a:p>
@@ -736,7 +737,7 @@
           <a:p>
             <a:fld id="{E9CC885B-4903-4D54-9A93-00025F12DED9}" type="datetimeFigureOut">
               <a:rPr kumimoji="1" lang="ja-JP" altLang="en-US" smtClean="0"/>
-              <a:t>2026/2/18</a:t>
+              <a:t>2026/2/19</a:t>
             </a:fld>
             <a:endParaRPr kumimoji="1" lang="ja-JP" altLang="en-US"/>
           </a:p>
@@ -966,7 +967,7 @@
           <a:p>
             <a:fld id="{E9CC885B-4903-4D54-9A93-00025F12DED9}" type="datetimeFigureOut">
               <a:rPr kumimoji="1" lang="ja-JP" altLang="en-US" smtClean="0"/>
-              <a:t>2026/2/18</a:t>
+              <a:t>2026/2/19</a:t>
             </a:fld>
             <a:endParaRPr kumimoji="1" lang="ja-JP" altLang="en-US"/>
           </a:p>
@@ -1241,7 +1242,7 @@
           <a:p>
             <a:fld id="{E9CC885B-4903-4D54-9A93-00025F12DED9}" type="datetimeFigureOut">
               <a:rPr kumimoji="1" lang="ja-JP" altLang="en-US" smtClean="0"/>
-              <a:t>2026/2/18</a:t>
+              <a:t>2026/2/19</a:t>
             </a:fld>
             <a:endParaRPr kumimoji="1" lang="ja-JP" altLang="en-US"/>
           </a:p>
@@ -1570,7 +1571,7 @@
           <a:p>
             <a:fld id="{E9CC885B-4903-4D54-9A93-00025F12DED9}" type="datetimeFigureOut">
               <a:rPr kumimoji="1" lang="ja-JP" altLang="en-US" smtClean="0"/>
-              <a:t>2026/2/18</a:t>
+              <a:t>2026/2/19</a:t>
             </a:fld>
             <a:endParaRPr kumimoji="1" lang="ja-JP" altLang="en-US"/>
           </a:p>
@@ -2046,7 +2047,7 @@
           <a:p>
             <a:fld id="{E9CC885B-4903-4D54-9A93-00025F12DED9}" type="datetimeFigureOut">
               <a:rPr kumimoji="1" lang="ja-JP" altLang="en-US" smtClean="0"/>
-              <a:t>2026/2/18</a:t>
+              <a:t>2026/2/19</a:t>
             </a:fld>
             <a:endParaRPr kumimoji="1" lang="ja-JP" altLang="en-US"/>
           </a:p>
@@ -2187,7 +2188,7 @@
           <a:p>
             <a:fld id="{E9CC885B-4903-4D54-9A93-00025F12DED9}" type="datetimeFigureOut">
               <a:rPr kumimoji="1" lang="ja-JP" altLang="en-US" smtClean="0"/>
-              <a:t>2026/2/18</a:t>
+              <a:t>2026/2/19</a:t>
             </a:fld>
             <a:endParaRPr kumimoji="1" lang="ja-JP" altLang="en-US"/>
           </a:p>
@@ -2300,7 +2301,7 @@
           <a:p>
             <a:fld id="{E9CC885B-4903-4D54-9A93-00025F12DED9}" type="datetimeFigureOut">
               <a:rPr kumimoji="1" lang="ja-JP" altLang="en-US" smtClean="0"/>
-              <a:t>2026/2/18</a:t>
+              <a:t>2026/2/19</a:t>
             </a:fld>
             <a:endParaRPr kumimoji="1" lang="ja-JP" altLang="en-US"/>
           </a:p>
@@ -2643,7 +2644,7 @@
           <a:p>
             <a:fld id="{E9CC885B-4903-4D54-9A93-00025F12DED9}" type="datetimeFigureOut">
               <a:rPr kumimoji="1" lang="ja-JP" altLang="en-US" smtClean="0"/>
-              <a:t>2026/2/18</a:t>
+              <a:t>2026/2/19</a:t>
             </a:fld>
             <a:endParaRPr kumimoji="1" lang="ja-JP" altLang="en-US"/>
           </a:p>
@@ -2931,7 +2932,7 @@
           <a:p>
             <a:fld id="{E9CC885B-4903-4D54-9A93-00025F12DED9}" type="datetimeFigureOut">
               <a:rPr kumimoji="1" lang="ja-JP" altLang="en-US" smtClean="0"/>
-              <a:t>2026/2/18</a:t>
+              <a:t>2026/2/19</a:t>
             </a:fld>
             <a:endParaRPr kumimoji="1" lang="ja-JP" altLang="en-US"/>
           </a:p>
@@ -3204,7 +3205,7 @@
           <a:p>
             <a:fld id="{E9CC885B-4903-4D54-9A93-00025F12DED9}" type="datetimeFigureOut">
               <a:rPr kumimoji="1" lang="ja-JP" altLang="en-US" smtClean="0"/>
-              <a:t>2026/2/18</a:t>
+              <a:t>2026/2/19</a:t>
             </a:fld>
             <a:endParaRPr kumimoji="1" lang="ja-JP" altLang="en-US"/>
           </a:p>
@@ -4448,7 +4449,7 @@
         <p:spPr>
           <a:xfrm>
             <a:off x="567542" y="1216429"/>
-            <a:ext cx="9749785" cy="461665"/>
+            <a:ext cx="9796272" cy="461665"/>
           </a:xfrm>
           <a:prstGeom prst="rect">
             <a:avLst/>
@@ -4467,7 +4468,7 @@
                   <a:srgbClr val="FF0000"/>
                 </a:solidFill>
               </a:rPr>
-              <a:t>MapManager.cpp</a:t>
+              <a:t>SlopeBlock.cpp</a:t>
             </a:r>
             <a:r>
               <a:rPr kumimoji="1" lang="ja-JP" altLang="en-US" sz="2400" dirty="0"/>
@@ -4479,7 +4480,7 @@
                   <a:srgbClr val="0070C0"/>
                 </a:solidFill>
               </a:rPr>
-              <a:t>ResolveSlope</a:t>
+              <a:t>GetSlopeHeight</a:t>
             </a:r>
             <a:r>
               <a:rPr kumimoji="1" lang="ja-JP" altLang="en-US" sz="2400" b="1" dirty="0">
@@ -4499,10 +4500,10 @@
       </p:sp>
       <p:pic>
         <p:nvPicPr>
-          <p:cNvPr id="5" name="図 4">
-            <a:extLst>
-              <a:ext uri="{FF2B5EF4-FFF2-40B4-BE49-F238E27FC236}">
-                <a16:creationId xmlns:a16="http://schemas.microsoft.com/office/drawing/2014/main" id="{EC22FF88-62CB-4F54-8577-B66B78F3AB6D}"/>
+          <p:cNvPr id="3" name="図 2">
+            <a:extLst>
+              <a:ext uri="{FF2B5EF4-FFF2-40B4-BE49-F238E27FC236}">
+                <a16:creationId xmlns:a16="http://schemas.microsoft.com/office/drawing/2014/main" id="{C27814EC-5B6B-4B86-9D90-28EAE86ECAE5}"/>
               </a:ext>
             </a:extLst>
           </p:cNvPr>
@@ -4520,7 +4521,7 @@
         <p:spPr>
           <a:xfrm>
             <a:off x="567542" y="1817794"/>
-            <a:ext cx="10973680" cy="2314935"/>
+            <a:ext cx="7678991" cy="4729183"/>
           </a:xfrm>
           <a:prstGeom prst="rect">
             <a:avLst/>
@@ -5508,14 +5509,14 @@
                   <a:t>座標・・・</a:t>
                 </a:r>
                 <a:r>
-                  <a:rPr lang="en-US" altLang="ja-JP" sz="2400" dirty="0" err="1">
+                  <a:rPr lang="en-US" altLang="ja-JP" sz="2400" b="1" dirty="0" err="1">
                     <a:solidFill>
                       <a:srgbClr val="0070C0"/>
                     </a:solidFill>
                   </a:rPr>
                   <a:t>playerFootX</a:t>
                 </a:r>
-                <a:endParaRPr lang="en-US" altLang="ja-JP" sz="2400" dirty="0">
+                <a:endParaRPr lang="en-US" altLang="ja-JP" sz="2400" b="1" dirty="0">
                   <a:solidFill>
                     <a:srgbClr val="0070C0"/>
                   </a:solidFill>
@@ -5628,6 +5629,331 @@
         <p:spPr>
           <a:xfrm>
             <a:off x="567542" y="491954"/>
+            <a:ext cx="2236510" cy="584775"/>
+          </a:xfrm>
+          <a:prstGeom prst="rect">
+            <a:avLst/>
+          </a:prstGeom>
+          <a:noFill/>
+        </p:spPr>
+        <p:txBody>
+          <a:bodyPr wrap="none" rtlCol="0">
+            <a:spAutoFit/>
+          </a:bodyPr>
+          <a:lstStyle/>
+          <a:p>
+            <a:r>
+              <a:rPr kumimoji="1" lang="ja-JP" altLang="en-US" sz="3200" b="1" u="sng" dirty="0"/>
+              <a:t>坂道の移動</a:t>
+            </a:r>
+          </a:p>
+        </p:txBody>
+      </p:sp>
+      <mc:AlternateContent xmlns:mc="http://schemas.openxmlformats.org/markup-compatibility/2006">
+        <mc:Choice xmlns:a14="http://schemas.microsoft.com/office/drawing/2010/main" Requires="a14">
+          <p:sp>
+            <p:nvSpPr>
+              <p:cNvPr id="6" name="テキスト ボックス 5">
+                <a:extLst>
+                  <a:ext uri="{FF2B5EF4-FFF2-40B4-BE49-F238E27FC236}">
+                    <a16:creationId xmlns:a16="http://schemas.microsoft.com/office/drawing/2014/main" id="{55830AD6-028B-4C4E-80BF-B70DFC1C3A46}"/>
+                  </a:ext>
+                </a:extLst>
+              </p:cNvPr>
+              <p:cNvSpPr txBox="1"/>
+              <p:nvPr/>
+            </p:nvSpPr>
+            <p:spPr>
+              <a:xfrm>
+                <a:off x="567542" y="1216429"/>
+                <a:ext cx="10737235" cy="3416513"/>
+              </a:xfrm>
+              <a:prstGeom prst="rect">
+                <a:avLst/>
+              </a:prstGeom>
+              <a:noFill/>
+            </p:spPr>
+            <p:txBody>
+              <a:bodyPr wrap="none" rtlCol="0">
+                <a:spAutoFit/>
+              </a:bodyPr>
+              <a:lstStyle/>
+              <a:p>
+                <a:r>
+                  <a:rPr kumimoji="1" lang="ja-JP" altLang="en-US" sz="2400" dirty="0"/>
+                  <a:t>③ 傾き、切片、プレイヤーの足元の座標から、坂の高さを求めます。</a:t>
+                </a:r>
+                <a:endParaRPr kumimoji="1" lang="en-US" altLang="ja-JP" sz="2400" dirty="0"/>
+              </a:p>
+              <a:p>
+                <a:endParaRPr lang="en-US" altLang="ja-JP" sz="2400" dirty="0"/>
+              </a:p>
+              <a:p>
+                <a:pPr/>
+                <a14:m>
+                  <m:oMathPara xmlns:m="http://schemas.openxmlformats.org/officeDocument/2006/math">
+                    <m:oMathParaPr>
+                      <m:jc m:val="left"/>
+                    </m:oMathParaPr>
+                    <m:oMath xmlns:m="http://schemas.openxmlformats.org/officeDocument/2006/math">
+                      <m:r>
+                        <a:rPr kumimoji="1" lang="en-US" altLang="ja-JP" sz="2400" b="0" i="1" smtClean="0">
+                          <a:latin typeface="Cambria Math" panose="02040503050406030204" pitchFamily="18" charset="0"/>
+                        </a:rPr>
+                        <m:t>𝑦</m:t>
+                      </m:r>
+                      <m:r>
+                        <a:rPr kumimoji="1" lang="en-US" altLang="ja-JP" sz="2400" b="0" i="1" smtClean="0">
+                          <a:latin typeface="Cambria Math" panose="02040503050406030204" pitchFamily="18" charset="0"/>
+                        </a:rPr>
+                        <m:t>=</m:t>
+                      </m:r>
+                      <m:r>
+                        <a:rPr kumimoji="1" lang="en-US" altLang="ja-JP" sz="2400" b="0" i="1" smtClean="0">
+                          <a:latin typeface="Cambria Math" panose="02040503050406030204" pitchFamily="18" charset="0"/>
+                        </a:rPr>
+                        <m:t>𝑚𝑥</m:t>
+                      </m:r>
+                      <m:r>
+                        <a:rPr kumimoji="1" lang="en-US" altLang="ja-JP" sz="2400" b="0" i="1" smtClean="0">
+                          <a:latin typeface="Cambria Math" panose="02040503050406030204" pitchFamily="18" charset="0"/>
+                        </a:rPr>
+                        <m:t>+</m:t>
+                      </m:r>
+                      <m:r>
+                        <a:rPr kumimoji="1" lang="en-US" altLang="ja-JP" sz="2400" b="0" i="1" smtClean="0">
+                          <a:latin typeface="Cambria Math" panose="02040503050406030204" pitchFamily="18" charset="0"/>
+                        </a:rPr>
+                        <m:t>𝑏</m:t>
+                      </m:r>
+                    </m:oMath>
+                  </m:oMathPara>
+                </a14:m>
+                <a:endParaRPr kumimoji="1" lang="en-US" altLang="ja-JP" sz="2400" dirty="0"/>
+              </a:p>
+              <a:p>
+                <a14:m>
+                  <m:oMath xmlns:m="http://schemas.openxmlformats.org/officeDocument/2006/math">
+                    <m:r>
+                      <a:rPr lang="ja-JP" altLang="en-US" sz="2400" b="0" i="1" dirty="0">
+                        <a:latin typeface="Cambria Math" panose="02040503050406030204" pitchFamily="18" charset="0"/>
+                      </a:rPr>
+                      <m:t>坂道の高さ</m:t>
+                    </m:r>
+                    <m:r>
+                      <a:rPr kumimoji="1" lang="en-US" altLang="ja-JP" sz="2400" b="0" i="1" smtClean="0">
+                        <a:latin typeface="Cambria Math" panose="02040503050406030204" pitchFamily="18" charset="0"/>
+                      </a:rPr>
+                      <m:t>=</m:t>
+                    </m:r>
+                    <m:r>
+                      <a:rPr lang="ja-JP" altLang="en-US" sz="2400" i="1">
+                        <a:latin typeface="Cambria Math" panose="02040503050406030204" pitchFamily="18" charset="0"/>
+                      </a:rPr>
+                      <m:t>傾き</m:t>
+                    </m:r>
+                    <m:r>
+                      <a:rPr lang="en-US" altLang="ja-JP" sz="2400" i="1" smtClean="0">
+                        <a:latin typeface="Cambria Math" panose="02040503050406030204" pitchFamily="18" charset="0"/>
+                      </a:rPr>
+                      <m:t>×</m:t>
+                    </m:r>
+                    <m:r>
+                      <a:rPr lang="ja-JP" altLang="en-US" sz="2400" i="1">
+                        <a:latin typeface="Cambria Math" panose="02040503050406030204" pitchFamily="18" charset="0"/>
+                      </a:rPr>
+                      <m:t>足元</m:t>
+                    </m:r>
+                    <m:r>
+                      <a:rPr lang="en-US" altLang="ja-JP" sz="2400" b="0" i="1" smtClean="0">
+                        <a:latin typeface="Cambria Math" panose="02040503050406030204" pitchFamily="18" charset="0"/>
+                      </a:rPr>
+                      <m:t>𝑋</m:t>
+                    </m:r>
+                    <m:r>
+                      <a:rPr kumimoji="1" lang="en-US" altLang="ja-JP" sz="2400" b="0" i="1" smtClean="0">
+                        <a:latin typeface="Cambria Math" panose="02040503050406030204" pitchFamily="18" charset="0"/>
+                      </a:rPr>
+                      <m:t>+</m:t>
+                    </m:r>
+                    <m:r>
+                      <a:rPr lang="ja-JP" altLang="en-US" sz="2400" i="1">
+                        <a:latin typeface="Cambria Math" panose="02040503050406030204" pitchFamily="18" charset="0"/>
+                      </a:rPr>
+                      <m:t>切片</m:t>
+                    </m:r>
+                  </m:oMath>
+                </a14:m>
+                <a:r>
+                  <a:rPr kumimoji="1" lang="en-US" altLang="ja-JP" sz="2400" dirty="0"/>
+                  <a:t>	</a:t>
+                </a:r>
+                <a:r>
+                  <a:rPr kumimoji="1" lang="ja-JP" altLang="en-US" sz="2400" dirty="0"/>
+                  <a:t>・・・</a:t>
+                </a:r>
+                <a:r>
+                  <a:rPr lang="en-US" altLang="ja-JP" sz="2400" dirty="0"/>
+                  <a:t> </a:t>
+                </a:r>
+                <a:r>
+                  <a:rPr kumimoji="1" lang="ja-JP" altLang="en-US" sz="2400" dirty="0"/>
+                  <a:t>わかっている要素を置き換え</a:t>
+                </a:r>
+                <a:endParaRPr kumimoji="1" lang="en-US" altLang="ja-JP" sz="2400" dirty="0"/>
+              </a:p>
+              <a:p>
+                <a:endParaRPr lang="en-US" altLang="ja-JP" sz="2400" dirty="0"/>
+              </a:p>
+              <a:p>
+                <a:r>
+                  <a:rPr kumimoji="1" lang="ja-JP" altLang="en-US" sz="2400" dirty="0"/>
+                  <a:t>足元の</a:t>
+                </a:r>
+                <a:r>
+                  <a:rPr kumimoji="1" lang="en-US" altLang="ja-JP" sz="2400" dirty="0"/>
+                  <a:t>X</a:t>
+                </a:r>
+                <a:r>
+                  <a:rPr kumimoji="1" lang="ja-JP" altLang="en-US" sz="2400" dirty="0"/>
+                  <a:t>座標はすでに用意しています。</a:t>
+                </a:r>
+                <a:endParaRPr kumimoji="1" lang="en-US" altLang="ja-JP" sz="2400" dirty="0"/>
+              </a:p>
+              <a:p>
+                <a:r>
+                  <a:rPr lang="ja-JP" altLang="en-US" sz="2400" dirty="0"/>
+                  <a:t>足元の</a:t>
+                </a:r>
+                <a:r>
+                  <a:rPr lang="en-US" altLang="ja-JP" sz="2400" dirty="0"/>
+                  <a:t>X</a:t>
+                </a:r>
+                <a:r>
+                  <a:rPr lang="ja-JP" altLang="en-US" sz="2400" dirty="0"/>
+                  <a:t>座標・・・</a:t>
+                </a:r>
+                <a:r>
+                  <a:rPr lang="en-US" altLang="ja-JP" sz="2400" b="1" dirty="0" err="1">
+                    <a:solidFill>
+                      <a:srgbClr val="0070C0"/>
+                    </a:solidFill>
+                  </a:rPr>
+                  <a:t>playerFootX</a:t>
+                </a:r>
+                <a:endParaRPr lang="en-US" altLang="ja-JP" sz="2400" b="1" dirty="0">
+                  <a:solidFill>
+                    <a:srgbClr val="0070C0"/>
+                  </a:solidFill>
+                </a:endParaRPr>
+              </a:p>
+              <a:p>
+                <a:endParaRPr kumimoji="1" lang="en-US" altLang="ja-JP" sz="2400" dirty="0">
+                  <a:solidFill>
+                    <a:srgbClr val="0070C0"/>
+                  </a:solidFill>
+                </a:endParaRPr>
+              </a:p>
+              <a:p>
+                <a:r>
+                  <a:rPr lang="ja-JP" altLang="en-US" sz="2400" dirty="0"/>
+                  <a:t>正しく計算できていれば、坂道を上ることができます。</a:t>
+                </a:r>
+                <a:endParaRPr kumimoji="1" lang="en-US" altLang="ja-JP" sz="2400" dirty="0"/>
+              </a:p>
+            </p:txBody>
+          </p:sp>
+        </mc:Choice>
+        <mc:Fallback>
+          <p:sp>
+            <p:nvSpPr>
+              <p:cNvPr id="6" name="テキスト ボックス 5">
+                <a:extLst>
+                  <a:ext uri="{FF2B5EF4-FFF2-40B4-BE49-F238E27FC236}">
+                    <a16:creationId xmlns:a16="http://schemas.microsoft.com/office/drawing/2014/main" id="{55830AD6-028B-4C4E-80BF-B70DFC1C3A46}"/>
+                  </a:ext>
+                </a:extLst>
+              </p:cNvPr>
+              <p:cNvSpPr txBox="1">
+                <a:spLocks noRot="1" noChangeAspect="1" noMove="1" noResize="1" noEditPoints="1" noAdjustHandles="1" noChangeArrowheads="1" noChangeShapeType="1" noTextEdit="1"/>
+              </p:cNvSpPr>
+              <p:nvPr/>
+            </p:nvSpPr>
+            <p:spPr>
+              <a:xfrm>
+                <a:off x="567542" y="1216429"/>
+                <a:ext cx="10737235" cy="3416513"/>
+              </a:xfrm>
+              <a:prstGeom prst="rect">
+                <a:avLst/>
+              </a:prstGeom>
+              <a:blipFill>
+                <a:blip r:embed="rId2"/>
+                <a:stretch>
+                  <a:fillRect l="-852" t="-1429" b="-3214"/>
+                </a:stretch>
+              </a:blipFill>
+            </p:spPr>
+            <p:txBody>
+              <a:bodyPr/>
+              <a:lstStyle/>
+              <a:p>
+                <a:r>
+                  <a:rPr lang="ja-JP" altLang="en-US">
+                    <a:noFill/>
+                  </a:rPr>
+                  <a:t> </a:t>
+                </a:r>
+              </a:p>
+            </p:txBody>
+          </p:sp>
+        </mc:Fallback>
+      </mc:AlternateContent>
+    </p:spTree>
+    <p:extLst>
+      <p:ext uri="{BB962C8B-B14F-4D97-AF65-F5344CB8AC3E}">
+        <p14:creationId xmlns:p14="http://schemas.microsoft.com/office/powerpoint/2010/main" val="3596630332"/>
+      </p:ext>
+    </p:extLst>
+  </p:cSld>
+  <p:clrMapOvr>
+    <a:masterClrMapping/>
+  </p:clrMapOvr>
+</p:sld>
+</file>
+
+<file path=ppt/slides/slide9.xml><?xml version="1.0" encoding="utf-8"?>
+<p:sld xmlns:a="http://schemas.openxmlformats.org/drawingml/2006/main" xmlns:r="http://schemas.openxmlformats.org/officeDocument/2006/relationships" xmlns:p="http://schemas.openxmlformats.org/presentationml/2006/main">
+  <p:cSld>
+    <p:spTree>
+      <p:nvGrpSpPr>
+        <p:cNvPr id="1" name=""/>
+        <p:cNvGrpSpPr/>
+        <p:nvPr/>
+      </p:nvGrpSpPr>
+      <p:grpSpPr>
+        <a:xfrm>
+          <a:off x="0" y="0"/>
+          <a:ext cx="0" cy="0"/>
+          <a:chOff x="0" y="0"/>
+          <a:chExt cx="0" cy="0"/>
+        </a:xfrm>
+      </p:grpSpPr>
+      <p:sp>
+        <p:nvSpPr>
+          <p:cNvPr id="4" name="テキスト ボックス 3">
+            <a:extLst>
+              <a:ext uri="{FF2B5EF4-FFF2-40B4-BE49-F238E27FC236}">
+                <a16:creationId xmlns:a16="http://schemas.microsoft.com/office/drawing/2014/main" id="{5A13BF46-B8C5-48AA-8308-C9ECFF431A18}"/>
+              </a:ext>
+            </a:extLst>
+          </p:cNvPr>
+          <p:cNvSpPr txBox="1"/>
+          <p:nvPr/>
+        </p:nvSpPr>
+        <p:spPr>
+          <a:xfrm>
+            <a:off x="567542" y="491954"/>
             <a:ext cx="3174267" cy="584775"/>
           </a:xfrm>
           <a:prstGeom prst="rect">
@@ -5643,8 +5969,13 @@
           <a:p>
             <a:r>
               <a:rPr kumimoji="1" lang="ja-JP" altLang="en-US" sz="3200" b="1" u="sng" dirty="0"/>
-              <a:t>坂道の移動 補足</a:t>
-            </a:r>
+              <a:t>坂道</a:t>
+            </a:r>
+            <a:r>
+              <a:rPr kumimoji="1" lang="ja-JP" altLang="en-US" sz="3200" b="1" u="sng"/>
+              <a:t>の移動 補足</a:t>
+            </a:r>
+            <a:endParaRPr kumimoji="1" lang="ja-JP" altLang="en-US" sz="3200" b="1" u="sng" dirty="0"/>
           </a:p>
         </p:txBody>
       </p:sp>
@@ -5663,7 +5994,7 @@
         <p:spPr>
           <a:xfrm>
             <a:off x="567542" y="1216429"/>
-            <a:ext cx="8802410" cy="1200329"/>
+            <a:ext cx="7571303" cy="461665"/>
           </a:xfrm>
           <a:prstGeom prst="rect">
             <a:avLst/>
@@ -5677,81 +6008,8 @@
           <a:lstStyle/>
           <a:p>
             <a:r>
-              <a:rPr kumimoji="1" lang="ja-JP" altLang="en-US" sz="2400" dirty="0"/>
-              <a:t>坂の高さよりも少し高いところからあたったようにしないと、</a:t>
-            </a:r>
-            <a:endParaRPr kumimoji="1" lang="en-US" altLang="ja-JP" sz="2400" dirty="0"/>
-          </a:p>
-          <a:p>
-            <a:r>
               <a:rPr lang="ja-JP" altLang="en-US" sz="2400" dirty="0"/>
-              <a:t>下るときに浮いてしまいます。</a:t>
-            </a:r>
-            <a:endParaRPr lang="en-US" altLang="ja-JP" sz="2400" dirty="0"/>
-          </a:p>
-          <a:p>
-            <a:r>
-              <a:rPr kumimoji="1" lang="ja-JP" altLang="en-US" sz="2400" dirty="0"/>
-              <a:t>このようにゲーム次第では様々な工夫が必要になります。</a:t>
-            </a:r>
-            <a:endParaRPr kumimoji="1" lang="en-US" altLang="ja-JP" sz="2400" dirty="0"/>
-          </a:p>
-        </p:txBody>
-      </p:sp>
-      <p:sp>
-        <p:nvSpPr>
-          <p:cNvPr id="7" name="テキスト ボックス 6">
-            <a:extLst>
-              <a:ext uri="{FF2B5EF4-FFF2-40B4-BE49-F238E27FC236}">
-                <a16:creationId xmlns:a16="http://schemas.microsoft.com/office/drawing/2014/main" id="{B3CF12F1-9D14-40C3-A36E-34B174E963DA}"/>
-              </a:ext>
-            </a:extLst>
-          </p:cNvPr>
-          <p:cNvSpPr txBox="1"/>
-          <p:nvPr/>
-        </p:nvSpPr>
-        <p:spPr>
-          <a:xfrm>
-            <a:off x="553139" y="5420688"/>
-            <a:ext cx="8210902" cy="830997"/>
-          </a:xfrm>
-          <a:prstGeom prst="rect">
-            <a:avLst/>
-          </a:prstGeom>
-          <a:noFill/>
-        </p:spPr>
-        <p:txBody>
-          <a:bodyPr wrap="none" rtlCol="0">
-            <a:spAutoFit/>
-          </a:bodyPr>
-          <a:lstStyle/>
-          <a:p>
-            <a:r>
-              <a:rPr kumimoji="1" lang="en-US" altLang="ja-JP" sz="2400" b="1" dirty="0">
-                <a:solidFill>
-                  <a:srgbClr val="7030A0"/>
-                </a:solidFill>
-              </a:rPr>
-              <a:t>SLOPE_ATTRACTION</a:t>
-            </a:r>
-            <a:r>
-              <a:rPr kumimoji="1" lang="ja-JP" altLang="en-US" sz="2400" dirty="0"/>
-              <a:t>を</a:t>
-            </a:r>
-            <a:r>
-              <a:rPr kumimoji="1" lang="en-US" altLang="ja-JP" sz="2400" dirty="0"/>
-              <a:t>0</a:t>
-            </a:r>
-            <a:r>
-              <a:rPr kumimoji="1" lang="ja-JP" altLang="en-US" sz="2400" dirty="0"/>
-              <a:t>にして坂を下ってみましょう。</a:t>
-            </a:r>
-            <a:endParaRPr kumimoji="1" lang="en-US" altLang="ja-JP" sz="2400" dirty="0"/>
-          </a:p>
-          <a:p>
-            <a:r>
-              <a:rPr lang="ja-JP" altLang="en-US" sz="2400" dirty="0"/>
-              <a:t>浮きながら坂を下ると思います。</a:t>
+              <a:t>このように押し出し処理をして坂道を登っています。</a:t>
             </a:r>
             <a:endParaRPr kumimoji="1" lang="en-US" altLang="ja-JP" sz="2400" dirty="0"/>
           </a:p>
@@ -5759,10 +6017,10 @@
       </p:sp>
       <p:pic>
         <p:nvPicPr>
-          <p:cNvPr id="9" name="図 8">
-            <a:extLst>
-              <a:ext uri="{FF2B5EF4-FFF2-40B4-BE49-F238E27FC236}">
-                <a16:creationId xmlns:a16="http://schemas.microsoft.com/office/drawing/2014/main" id="{52F0E5DC-082D-49B2-A425-79327379C751}"/>
+          <p:cNvPr id="3" name="図 2">
+            <a:extLst>
+              <a:ext uri="{FF2B5EF4-FFF2-40B4-BE49-F238E27FC236}">
+                <a16:creationId xmlns:a16="http://schemas.microsoft.com/office/drawing/2014/main" id="{74A3F8AD-23A9-456E-9797-7AD6CF16DB0A}"/>
               </a:ext>
             </a:extLst>
           </p:cNvPr>
@@ -5779,8 +6037,8 @@
         </p:blipFill>
         <p:spPr>
           <a:xfrm>
-            <a:off x="567542" y="2556458"/>
-            <a:ext cx="8049748" cy="2724530"/>
+            <a:off x="567542" y="1817794"/>
+            <a:ext cx="10790661" cy="3753273"/>
           </a:xfrm>
           <a:prstGeom prst="rect">
             <a:avLst/>
@@ -5790,7 +6048,7 @@
     </p:spTree>
     <p:extLst>
       <p:ext uri="{BB962C8B-B14F-4D97-AF65-F5344CB8AC3E}">
-        <p14:creationId xmlns:p14="http://schemas.microsoft.com/office/powerpoint/2010/main" val="3862509137"/>
+        <p14:creationId xmlns:p14="http://schemas.microsoft.com/office/powerpoint/2010/main" val="1386691937"/>
       </p:ext>
     </p:extLst>
   </p:cSld>
